--- a/Design Thinking_Presentation_V2.pptx
+++ b/Design Thinking_Presentation_V2.pptx
@@ -3284,9 +3284,9 @@
           <a:p>
             <a:pPr>
               <a:spcAft>
-                <a:spcPts val="300"/>
-              </a:spcAft>
-              <a:defRPr sz="1200">
+                <a:spcPts val="600"/>
+              </a:spcAft>
+              <a:defRPr sz="1300">
                 <a:solidFill>
                   <a:srgbClr val="FFFFFF"/>
                 </a:solidFill>
@@ -3299,9 +3299,9 @@
           <a:p>
             <a:pPr>
               <a:spcAft>
-                <a:spcPts val="300"/>
-              </a:spcAft>
-              <a:defRPr sz="1200">
+                <a:spcPts val="600"/>
+              </a:spcAft>
+              <a:defRPr sz="1300">
                 <a:solidFill>
                   <a:srgbClr val="FFFFFF"/>
                 </a:solidFill>
@@ -3309,36 +3309,6 @@
             </a:pPr>
             <a:r>
               <a:t>2. Team Member 2 (Reg. No: 2309xxxxx)</a:t>
-            </a:r>
-          </a:p>
-          <a:p>
-            <a:pPr>
-              <a:spcAft>
-                <a:spcPts val="300"/>
-              </a:spcAft>
-              <a:defRPr sz="1200">
-                <a:solidFill>
-                  <a:srgbClr val="FFFFFF"/>
-                </a:solidFill>
-              </a:defRPr>
-            </a:pPr>
-            <a:r>
-              <a:t>3. Team Member 3 (Reg. No: 2309xxxxx)</a:t>
-            </a:r>
-          </a:p>
-          <a:p>
-            <a:pPr>
-              <a:spcAft>
-                <a:spcPts val="300"/>
-              </a:spcAft>
-              <a:defRPr sz="1200">
-                <a:solidFill>
-                  <a:srgbClr val="FFFFFF"/>
-                </a:solidFill>
-              </a:defRPr>
-            </a:pPr>
-            <a:r>
-              <a:t>4. Team Member 4 (Reg. No: 2309xxxxx)</a:t>
             </a:r>
           </a:p>
         </p:txBody>

--- a/Design Thinking_Presentation_V2.pptx
+++ b/Design Thinking_Presentation_V2.pptx
@@ -3293,7 +3293,7 @@
               </a:defRPr>
             </a:pPr>
             <a:r>
-              <a:t>1. Team Member 1 (Reg. No: 2309xxxxx)</a:t>
+              <a:t>1. Sridhar Madhira (Reg. No: 2309xxxxx)</a:t>
             </a:r>
           </a:p>
           <a:p>
@@ -3308,7 +3308,7 @@
               </a:defRPr>
             </a:pPr>
             <a:r>
-              <a:t>2. Team Member 2 (Reg. No: 2309xxxxx)</a:t>
+              <a:t>2. Priyansh Kashyap | CSE (AI) (Reg. No: 235890468)</a:t>
             </a:r>
           </a:p>
         </p:txBody>
